--- a/content/W02/D2/slides/C2_W02_D02_half1_STUDENT.pptx
+++ b/content/W02/D2/slides/C2_W02_D02_half1_STUDENT.pptx
@@ -4863,14 +4863,14 @@
       </p:sp>
       <p:pic>
         <p:nvPicPr>
-          <p:cNvPr id="7" name="Picture 6" descr="b92df769f094bcfd.png"/>
+          <p:cNvPr id="7" name="Picture 6" descr="3d3cbc07fd0e2f75.png"/>
           <p:cNvPicPr>
             <a:picLocks noChangeAspect="1"/>
           </p:cNvPicPr>
           <p:nvPr/>
         </p:nvPicPr>
         <p:blipFill>
-          <a:blip r:embed="rId2"/>
+          <a:blip r:embed="rId3"/>
           <a:stretch>
             <a:fillRect/>
           </a:stretch>
@@ -6562,14 +6562,14 @@
       </p:sp>
       <p:pic>
         <p:nvPicPr>
-          <p:cNvPr id="6" name="Picture 5" descr="7bfeead9e1197b7e.png"/>
+          <p:cNvPr id="6" name="Picture 5" descr="d8faeebd20a3c048.png"/>
           <p:cNvPicPr>
             <a:picLocks noChangeAspect="1"/>
           </p:cNvPicPr>
           <p:nvPr/>
         </p:nvPicPr>
         <p:blipFill>
-          <a:blip r:embed="rId2"/>
+          <a:blip r:embed="rId3"/>
           <a:stretch>
             <a:fillRect/>
           </a:stretch>
@@ -8487,14 +8487,14 @@
       </p:sp>
       <p:pic>
         <p:nvPicPr>
-          <p:cNvPr id="6" name="Picture 5" descr="d0aee02c5069b237.png"/>
+          <p:cNvPr id="6" name="Picture 5" descr="a4f4792706667204.png"/>
           <p:cNvPicPr>
             <a:picLocks noChangeAspect="1"/>
           </p:cNvPicPr>
           <p:nvPr/>
         </p:nvPicPr>
         <p:blipFill>
-          <a:blip r:embed="rId2"/>
+          <a:blip r:embed="rId3"/>
           <a:stretch>
             <a:fillRect/>
           </a:stretch>
@@ -8851,14 +8851,14 @@
       </p:sp>
       <p:pic>
         <p:nvPicPr>
-          <p:cNvPr id="6" name="Picture 5" descr="7af3b731216af8f2.png"/>
+          <p:cNvPr id="6" name="Picture 5" descr="7b900e14ff44868b.png"/>
           <p:cNvPicPr>
             <a:picLocks noChangeAspect="1"/>
           </p:cNvPicPr>
           <p:nvPr/>
         </p:nvPicPr>
         <p:blipFill>
-          <a:blip r:embed="rId2"/>
+          <a:blip r:embed="rId3"/>
           <a:stretch>
             <a:fillRect/>
           </a:stretch>
@@ -11616,14 +11616,14 @@
       </p:sp>
       <p:pic>
         <p:nvPicPr>
-          <p:cNvPr id="7" name="Picture 6" descr="6cc578b2317d03b2.png"/>
+          <p:cNvPr id="7" name="Picture 6" descr="1aa8b783bd7df83f.png"/>
           <p:cNvPicPr>
             <a:picLocks noChangeAspect="1"/>
           </p:cNvPicPr>
           <p:nvPr/>
         </p:nvPicPr>
         <p:blipFill>
-          <a:blip r:embed="rId2"/>
+          <a:blip r:embed="rId3"/>
           <a:stretch>
             <a:fillRect/>
           </a:stretch>
@@ -12033,14 +12033,14 @@
       </p:sp>
       <p:pic>
         <p:nvPicPr>
-          <p:cNvPr id="6" name="Picture 5" descr="e8f8b8040b620644.png"/>
+          <p:cNvPr id="6" name="Picture 5" descr="ef83a1bf0003a75a.png"/>
           <p:cNvPicPr>
             <a:picLocks noChangeAspect="1"/>
           </p:cNvPicPr>
           <p:nvPr/>
         </p:nvPicPr>
         <p:blipFill>
-          <a:blip r:embed="rId2"/>
+          <a:blip r:embed="rId3"/>
           <a:stretch>
             <a:fillRect/>
           </a:stretch>

--- a/content/W02/D2/slides/C2_W02_D02_half1_STUDENT.pptx
+++ b/content/W02/D2/slides/C2_W02_D02_half1_STUDENT.pptx
@@ -10632,8 +10632,8 @@
         </p:blipFill>
         <p:spPr>
           <a:xfrm>
-            <a:off x="951840" y="2119407"/>
-            <a:ext cx="3943350" cy="3643312"/>
+            <a:off x="4192317" y="1664208"/>
+            <a:ext cx="3807059" cy="3517392"/>
           </a:xfrm>
           <a:prstGeom prst="rect">
             <a:avLst/>
@@ -10648,8 +10648,8 @@
         </p:nvSpPr>
         <p:spPr>
           <a:xfrm>
-            <a:off x="5761917" y="1956816"/>
-            <a:ext cx="5899425" cy="1074420"/>
+            <a:off x="530352" y="5227320"/>
+            <a:ext cx="11130991" cy="807720"/>
           </a:xfrm>
           <a:prstGeom prst="roundRect">
             <a:avLst>
@@ -10696,8 +10696,8 @@
         </p:nvSpPr>
         <p:spPr>
           <a:xfrm>
-            <a:off x="5908221" y="2084832"/>
-            <a:ext cx="45720" cy="818388"/>
+            <a:off x="676656" y="5355336"/>
+            <a:ext cx="45720" cy="551688"/>
           </a:xfrm>
           <a:prstGeom prst="roundRect">
             <a:avLst>
@@ -10742,8 +10742,8 @@
         </p:nvSpPr>
         <p:spPr>
           <a:xfrm>
-            <a:off x="6109389" y="2075688"/>
-            <a:ext cx="5332497" cy="891540"/>
+            <a:off x="877824" y="5346192"/>
+            <a:ext cx="10564063" cy="624840"/>
           </a:xfrm>
           <a:prstGeom prst="rect">
             <a:avLst/>
@@ -16772,7 +16772,7 @@
       </p:sp>
       <p:pic>
         <p:nvPicPr>
-          <p:cNvPr id="21" name="mermaid diagram" descr="9d9410948b6115af.png"/>
+          <p:cNvPr id="21" name="mermaid diagram" descr="31cfe99f33ea4d24.png"/>
           <p:cNvPicPr>
             <a:picLocks noChangeAspect="1"/>
           </p:cNvPicPr>
@@ -20003,7 +20003,7 @@
                 </a:solidFill>
                 <a:latin typeface="Calibri"/>
               </a:rPr>
-              <a:t>Week 2 Day 2: booked against collected</a:t>
+              <a:t>Week 2, Day 2. Booked against collected, without lying</a:t>
             </a:r>
           </a:p>
         </p:txBody>
@@ -24226,7 +24226,7 @@
                 </a:solidFill>
                 <a:latin typeface="Calibri"/>
               </a:rPr>
-              <a:t>Week 2 Day 2: booked against collected</a:t>
+              <a:t>Week 2, Day 2. Booked against collected, without lying</a:t>
             </a:r>
           </a:p>
         </p:txBody>
@@ -36987,7 +36987,7 @@
                 </a:solidFill>
                 <a:latin typeface="Calibri"/>
               </a:rPr>
-              <a:t>Week 2 Day 2: booked against collected</a:t>
+              <a:t>Week 2, Day 2. Booked against collected, without lying</a:t>
             </a:r>
           </a:p>
         </p:txBody>
@@ -54843,7 +54843,7 @@
                 </a:solidFill>
                 <a:latin typeface="Calibri"/>
               </a:rPr>
-              <a:t>[D] Design the validation you run before a joined number reaches Finance, and say what you do when it fails at 5 pm on reporting day.</a:t>
+              <a:t>[D] Design the validation you run before a joined number reaches Finance, and say what you do when it fails at the end of reporting day.</a:t>
             </a:r>
           </a:p>
         </p:txBody>
@@ -55725,7 +55725,7 @@
                 </a:solidFill>
                 <a:latin typeface="Calibri"/>
               </a:rPr>
-              <a:t>Week 2 Day 2: booked against collected</a:t>
+              <a:t>Week 2, Day 2. Booked against collected, without lying</a:t>
             </a:r>
           </a:p>
         </p:txBody>
